--- a/Aim_1/immune_results/RF/故事.pptx
+++ b/Aim_1/immune_results/RF/故事.pptx
@@ -881,11 +881,11 @@
           <a:p>
             <a:r>
               <a:rPr lang="zh-TW" altLang="en-US" dirty="0"/>
-              <a:t>圖片來源</a:t>
+              <a:t>資料來源</a:t>
             </a:r>
             <a:r>
               <a:rPr lang="en-US" altLang="zh-TW" dirty="0"/>
-              <a:t>:https://www.kegg.jp/pathway/map05143</a:t>
+              <a:t>:NCBI</a:t>
             </a:r>
             <a:endParaRPr lang="zh-TW" altLang="en-US" dirty="0"/>
           </a:p>
